--- a/RA3 - Seguretat activa/AA2 - Vulnerabilitats/RA3_AA2_Vulnerabilitats.pptx
+++ b/RA3 - Seguretat activa/AA2 - Vulnerabilitats/RA3_AA2_Vulnerabilitats.pptx
@@ -2140,6 +2140,10 @@
           </a:solidFill>
           <a:ln/>
         </p:spPr>
+        <p:txBody>
+          <a:bodyPr/>
+          <a:p/>
+        </p:txBody>
       </p:sp>
       <p:sp>
         <p:nvSpPr>
@@ -2160,6 +2164,10 @@
           </a:solidFill>
           <a:ln/>
         </p:spPr>
+        <p:txBody>
+          <a:bodyPr/>
+          <a:p/>
+        </p:txBody>
       </p:sp>
       <p:sp>
         <p:nvSpPr>
@@ -2585,6 +2593,10 @@
             </a:outerShdw>
           </a:effectLst>
         </p:spPr>
+        <p:txBody>
+          <a:bodyPr/>
+          <a:p/>
+        </p:txBody>
       </p:sp>
       <p:sp>
         <p:nvSpPr>
@@ -2605,6 +2617,10 @@
           </a:solidFill>
           <a:ln/>
         </p:spPr>
+        <p:txBody>
+          <a:bodyPr/>
+          <a:p/>
+        </p:txBody>
       </p:sp>
       <p:pic>
         <p:nvPicPr>
@@ -2744,6 +2760,10 @@
             </a:outerShdw>
           </a:effectLst>
         </p:spPr>
+        <p:txBody>
+          <a:bodyPr/>
+          <a:p/>
+        </p:txBody>
       </p:sp>
       <p:sp>
         <p:nvSpPr>
@@ -2764,6 +2784,10 @@
           </a:solidFill>
           <a:ln/>
         </p:spPr>
+        <p:txBody>
+          <a:bodyPr/>
+          <a:p/>
+        </p:txBody>
       </p:sp>
       <p:pic>
         <p:nvPicPr>
@@ -3040,6 +3064,10 @@
           </a:solidFill>
           <a:ln/>
         </p:spPr>
+        <p:txBody>
+          <a:bodyPr/>
+          <a:p/>
+        </p:txBody>
       </p:sp>
       <p:pic>
         <p:nvPicPr>
@@ -3347,6 +3375,10 @@
           </a:solidFill>
           <a:ln/>
         </p:spPr>
+        <p:txBody>
+          <a:bodyPr/>
+          <a:p/>
+        </p:txBody>
       </p:sp>
       <p:pic>
         <p:nvPicPr>
@@ -3596,6 +3628,10 @@
             </a:outerShdw>
           </a:effectLst>
         </p:spPr>
+        <p:txBody>
+          <a:bodyPr/>
+          <a:p/>
+        </p:txBody>
       </p:sp>
       <p:sp>
         <p:nvSpPr>
@@ -3616,6 +3652,10 @@
           </a:solidFill>
           <a:ln/>
         </p:spPr>
+        <p:txBody>
+          <a:bodyPr/>
+          <a:p/>
+        </p:txBody>
       </p:sp>
       <p:pic>
         <p:nvPicPr>
@@ -3755,6 +3795,10 @@
             </a:outerShdw>
           </a:effectLst>
         </p:spPr>
+        <p:txBody>
+          <a:bodyPr/>
+          <a:p/>
+        </p:txBody>
       </p:sp>
       <p:sp>
         <p:nvSpPr>
@@ -3775,6 +3819,10 @@
           </a:solidFill>
           <a:ln/>
         </p:spPr>
+        <p:txBody>
+          <a:bodyPr/>
+          <a:p/>
+        </p:txBody>
       </p:sp>
       <p:pic>
         <p:nvPicPr>
@@ -3914,6 +3962,10 @@
             </a:outerShdw>
           </a:effectLst>
         </p:spPr>
+        <p:txBody>
+          <a:bodyPr/>
+          <a:p/>
+        </p:txBody>
       </p:sp>
       <p:sp>
         <p:nvSpPr>
@@ -3934,6 +3986,10 @@
           </a:solidFill>
           <a:ln/>
         </p:spPr>
+        <p:txBody>
+          <a:bodyPr/>
+          <a:p/>
+        </p:txBody>
       </p:sp>
       <p:pic>
         <p:nvPicPr>
@@ -4857,7 +4913,7 @@
                 <a:ea typeface="Calibri" pitchFamily="34" charset="-122"/>
                 <a:cs typeface="Calibri" pitchFamily="34" charset="-120"/>
               </a:rPr>
-              <a:t>Llicència Creative Commons BY-NC-SA · Institut Obert de Catalunya, 2011 (materials adaptats i ampliats)</a:t>
+              <a:t>Llicència CC BY-SA 4.0 · Adaptat de "Materials" (SMX-0226SI), Carlos Alonso Martínez, Escola Pia de Mataró</a:t>
             </a:r>
             <a:endParaRPr lang="en-US" sz="1050" dirty="0"/>
           </a:p>
@@ -5084,6 +5140,10 @@
             </a:outerShdw>
           </a:effectLst>
         </p:spPr>
+        <p:txBody>
+          <a:bodyPr/>
+          <a:p/>
+        </p:txBody>
       </p:sp>
       <p:sp>
         <p:nvSpPr>
@@ -5104,6 +5164,10 @@
           </a:solidFill>
           <a:ln/>
         </p:spPr>
+        <p:txBody>
+          <a:bodyPr/>
+          <a:p/>
+        </p:txBody>
       </p:sp>
       <p:pic>
         <p:nvPicPr>
@@ -5243,6 +5307,10 @@
             </a:outerShdw>
           </a:effectLst>
         </p:spPr>
+        <p:txBody>
+          <a:bodyPr/>
+          <a:p/>
+        </p:txBody>
       </p:sp>
       <p:sp>
         <p:nvSpPr>
@@ -5263,6 +5331,10 @@
           </a:solidFill>
           <a:ln/>
         </p:spPr>
+        <p:txBody>
+          <a:bodyPr/>
+          <a:p/>
+        </p:txBody>
       </p:sp>
       <p:pic>
         <p:nvPicPr>
@@ -5402,6 +5474,10 @@
             </a:outerShdw>
           </a:effectLst>
         </p:spPr>
+        <p:txBody>
+          <a:bodyPr/>
+          <a:p/>
+        </p:txBody>
       </p:sp>
       <p:sp>
         <p:nvSpPr>
@@ -5422,6 +5498,10 @@
           </a:solidFill>
           <a:ln/>
         </p:spPr>
+        <p:txBody>
+          <a:bodyPr/>
+          <a:p/>
+        </p:txBody>
       </p:sp>
       <p:pic>
         <p:nvPicPr>
@@ -6972,6 +7052,10 @@
           </a:solidFill>
           <a:ln/>
         </p:spPr>
+        <p:txBody>
+          <a:bodyPr/>
+          <a:p/>
+        </p:txBody>
       </p:sp>
       <p:pic>
         <p:nvPicPr>
@@ -7279,6 +7363,10 @@
           </a:solidFill>
           <a:ln/>
         </p:spPr>
+        <p:txBody>
+          <a:bodyPr/>
+          <a:p/>
+        </p:txBody>
       </p:sp>
       <p:pic>
         <p:nvPicPr>
@@ -7516,6 +7604,10 @@
           </a:solidFill>
           <a:ln/>
         </p:spPr>
+        <p:txBody>
+          <a:bodyPr/>
+          <a:p/>
+        </p:txBody>
       </p:sp>
       <p:pic>
         <p:nvPicPr>
@@ -8414,6 +8506,10 @@
             </a:outerShdw>
           </a:effectLst>
         </p:spPr>
+        <p:txBody>
+          <a:bodyPr/>
+          <a:p/>
+        </p:txBody>
       </p:sp>
       <p:sp>
         <p:nvSpPr>
@@ -8434,6 +8530,10 @@
           </a:solidFill>
           <a:ln/>
         </p:spPr>
+        <p:txBody>
+          <a:bodyPr/>
+          <a:p/>
+        </p:txBody>
       </p:sp>
       <p:pic>
         <p:nvPicPr>
@@ -8573,6 +8673,10 @@
             </a:outerShdw>
           </a:effectLst>
         </p:spPr>
+        <p:txBody>
+          <a:bodyPr/>
+          <a:p/>
+        </p:txBody>
       </p:sp>
       <p:sp>
         <p:nvSpPr>
@@ -8593,6 +8697,10 @@
           </a:solidFill>
           <a:ln/>
         </p:spPr>
+        <p:txBody>
+          <a:bodyPr/>
+          <a:p/>
+        </p:txBody>
       </p:sp>
       <p:pic>
         <p:nvPicPr>
@@ -8915,6 +9023,10 @@
           </a:solidFill>
           <a:ln/>
         </p:spPr>
+        <p:txBody>
+          <a:bodyPr/>
+          <a:p/>
+        </p:txBody>
       </p:sp>
       <p:pic>
         <p:nvPicPr>
